--- a/dist/초5/과학/지층과빛/초5_과학_지층과빛_01_지층과화석_학생용.pptx
+++ b/dist/초5/과학/지층과빛/초5_과학_지층과빛_01_지층과화석_학생용.pptx
@@ -125,13 +125,13 @@
   <p:extLst>
     <p:ext uri="{521415D9-36F7-43E2-AB2F-B90AF26B5E84}">
       <p14:sectionLst xmlns:p14="http://schemas.microsoft.com/office/powerpoint/2010/main">
-        <p14:section name="도입" id="{e986a3cb-dfee-f88a-0cff-06c164791eec}">
+        <p14:section name="도입" id="{da4cf570-be64-c2af-0468-a539f6a1e8f2}">
           <p14:sldIdLst>
             <p14:sldId id="256"/>
             <p14:sldId id="257"/>
           </p14:sldIdLst>
         </p14:section>
-        <p14:section name="연습" id="{38d21a4a-5aba-707d-bf78-7498e8a1d015}">
+        <p14:section name="연습" id="{008df921-671e-b465-aa60-cf3bf1d3aa14}">
           <p14:sldIdLst>
             <p14:sldId id="258"/>
             <p14:sldId id="259"/>
@@ -145,40 +145,40 @@
             <p14:sldId id="270"/>
           </p14:sldIdLst>
         </p14:section>
-        <p14:section name="개념" id="{cfbe36b8-18be-f2bd-756e-dfea29bac149}">
+        <p14:section name="개념" id="{e142fec1-2db9-05ad-8763-51db8b425546}">
           <p14:sldIdLst>
             <p14:sldId id="261"/>
             <p14:sldId id="263"/>
             <p14:sldId id="269"/>
           </p14:sldIdLst>
         </p14:section>
-        <p14:section name="연습" id="{1b4209b3-00d4-da44-7f66-73153b7c9ebf}">
+        <p14:section name="연습" id="{3eec4b9b-50c3-5ba4-e052-3dd81391d198}">
           <p14:sldIdLst/>
         </p14:section>
-        <p14:section name="개념" id="{296192de-244f-efa6-9d5b-18d184c801a7}">
+        <p14:section name="개념" id="{9789d7f2-1d7e-3a79-40a5-d99f8a3013fc}">
           <p14:sldIdLst/>
         </p14:section>
-        <p14:section name="연습" id="{ad14243a-b509-ddae-2ca0-2aafac56a1bf}">
+        <p14:section name="연습" id="{6c29084e-635e-015b-8fc7-0cb8279197a8}">
           <p14:sldIdLst/>
         </p14:section>
-        <p14:section name="개념" id="{49d8402d-ff14-9ae2-2125-02234ec4ebc8}">
+        <p14:section name="개념" id="{a5db2ff2-765b-ba45-e69e-63f475970cb7}">
           <p14:sldIdLst/>
         </p14:section>
-        <p14:section name="연습" id="{44a6ed99-861f-85b5-75c9-0072d27f18b6}">
+        <p14:section name="연습" id="{62f719f9-7ca5-83ff-4407-6017740d74b3}">
           <p14:sldIdLst/>
         </p14:section>
-        <p14:section name="확인" id="{be6abe3d-4fd2-968d-7070-a83a45ab2e4c}">
+        <p14:section name="확인" id="{88b71fb6-2e71-41af-651f-8f3d2dfddd34}">
           <p14:sldIdLst>
             <p14:sldId id="271"/>
             <p14:sldId id="272"/>
           </p14:sldIdLst>
         </p14:section>
-        <p14:section name="정리" id="{2def651b-886e-50ec-d195-7831f5d7f3b7}">
+        <p14:section name="정리" id="{d6973fc8-d0be-dfc6-f470-38b9b7198eae}">
           <p14:sldIdLst>
             <p14:sldId id="273"/>
           </p14:sldIdLst>
         </p14:section>
-        <p14:section name="보충" id="{6f3f0ba3-9c24-ac4b-5c02-af8080c068b6}">
+        <p14:section name="보충" id="{d2af6385-4908-1881-ca87-ba6b0f86288b}">
           <p14:sldIdLst>
             <p14:sldId id="274"/>
           </p14:sldIdLst>
